--- a/10-Knowledge-Products/KP1-GEA/videos/module_5/en/decks/KP1_M5_Deck_v0.2.pptx
+++ b/10-Knowledge-Products/KP1-GEA/videos/module_5/en/decks/KP1_M5_Deck_v0.2.pptx
@@ -15808,7 +15808,7 @@
                 </a:solidFill>
                 <a:latin typeface="Arial"/>
               </a:rPr>
-              <a:t>~3 minutes · standalone video · voice-over on text slides</a:t>
+              <a:t>standalone video · voice-over on text slides</a:t>
             </a:r>
           </a:p>
         </p:txBody>
@@ -17936,7 +17936,7 @@
                 </a:solidFill>
                 <a:latin typeface="Arial"/>
               </a:rPr>
-              <a:t>~5 minutes · standalone video · voice-over on text slides</a:t>
+              <a:t>standalone video · voice-over on text slides</a:t>
             </a:r>
           </a:p>
         </p:txBody>
@@ -21097,7 +21097,7 @@
                 </a:solidFill>
                 <a:latin typeface="Arial"/>
               </a:rPr>
-              <a:t>~4 minutes · standalone video · voice-over on text slides</a:t>
+              <a:t>standalone video · voice-over on text slides</a:t>
             </a:r>
           </a:p>
         </p:txBody>
@@ -22035,7 +22035,7 @@
                 </a:solidFill>
                 <a:latin typeface="Arial"/>
               </a:rPr>
-              <a:t>~4 minutes · standalone video · voice-over on text slides</a:t>
+              <a:t>standalone video · voice-over on text slides</a:t>
             </a:r>
           </a:p>
         </p:txBody>
@@ -23683,7 +23683,7 @@
                 </a:solidFill>
                 <a:latin typeface="Arial"/>
               </a:rPr>
-              <a:t>~4 minutes · standalone video · voice-over on text slides</a:t>
+              <a:t>standalone video · voice-over on text slides</a:t>
             </a:r>
           </a:p>
         </p:txBody>
@@ -26155,7 +26155,7 @@
                 </a:solidFill>
                 <a:latin typeface="Arial"/>
               </a:rPr>
-              <a:t>~3 minutes · standalone video · voice-over on text slides</a:t>
+              <a:t>standalone video · voice-over on text slides</a:t>
             </a:r>
           </a:p>
         </p:txBody>

--- a/10-Knowledge-Products/KP1-GEA/videos/module_5/en/decks/KP1_M5_Deck_v0.2.pptx
+++ b/10-Knowledge-Products/KP1-GEA/videos/module_5/en/decks/KP1_M5_Deck_v0.2.pptx
@@ -15672,7 +15672,7 @@
                 </a:solidFill>
                 <a:latin typeface="Arial"/>
               </a:rPr>
-              <a:t>KP1 · MODULE 5 · VIDEO 5.2</a:t>
+              <a:t>MODULE 5 · VIDEO 5.2</a:t>
             </a:r>
           </a:p>
         </p:txBody>
@@ -17800,7 +17800,7 @@
                 </a:solidFill>
                 <a:latin typeface="Arial"/>
               </a:rPr>
-              <a:t>KP1 · MODULE 5 · VIDEO 5.3</a:t>
+              <a:t>MODULE 5 · VIDEO 5.3</a:t>
             </a:r>
           </a:p>
         </p:txBody>
@@ -20961,7 +20961,7 @@
                 </a:solidFill>
                 <a:latin typeface="Arial"/>
               </a:rPr>
-              <a:t>KP1 · MODULE 5 · VIDEO 5.4</a:t>
+              <a:t>MODULE 5 · VIDEO 5.4</a:t>
             </a:r>
           </a:p>
         </p:txBody>
@@ -21899,7 +21899,7 @@
                 </a:solidFill>
                 <a:latin typeface="Arial"/>
               </a:rPr>
-              <a:t>KP1 · MODULE 5 · VIDEO 5.1</a:t>
+              <a:t>MODULE 5 · VIDEO 5.1</a:t>
             </a:r>
           </a:p>
         </p:txBody>
@@ -23547,7 +23547,7 @@
                 </a:solidFill>
                 <a:latin typeface="Arial"/>
               </a:rPr>
-              <a:t>KP1 · MODULE 5 · VIDEO 5.5</a:t>
+              <a:t>MODULE 5 · VIDEO 5.5</a:t>
             </a:r>
           </a:p>
         </p:txBody>
@@ -26019,7 +26019,7 @@
                 </a:solidFill>
                 <a:latin typeface="Arial"/>
               </a:rPr>
-              <a:t>KP1 · MODULE 5 · VIDEO 5.6</a:t>
+              <a:t>MODULE 5 · VIDEO 5.6</a:t>
             </a:r>
           </a:p>
         </p:txBody>
